--- a/seminar/sekio-dx-2026-09/DXマーケティング後半編.pptx
+++ b/seminar/sekio-dx-2026-09/DXマーケティング後半編.pptx
@@ -18650,12 +18650,19 @@
           </a:p>
         </p:txBody>
       </p:sp>
-      <p:sp>
-        <p:nvSpPr>
-          <p:cNvPr id="6" name="Shape 4"/>
-          <p:cNvSpPr/>
-          <p:nvPr/>
-        </p:nvSpPr>
+      <p:pic>
+        <p:nvPicPr>
+          <p:cNvPr id="6" name="Image 0" descr="/home/user/town-design-labo/seminar/sekio-dx-2026-09/deck/assets/photos/ai.jpg">    </p:cNvPr>
+          <p:cNvPicPr>
+            <a:picLocks noChangeAspect="1"/>
+          </p:cNvPicPr>
+          <p:nvPr/>
+        </p:nvPicPr>
+        <p:blipFill>
+          <a:blip r:embed="rId1"/>
+          <a:srcRect l="0" r="0" t="0" b="0"/>
+          <a:stretch/>
+        </p:blipFill>
         <p:spPr>
           <a:xfrm>
             <a:off x="548640" y="2331720"/>
@@ -18664,76 +18671,11 @@
           <a:prstGeom prst="rect">
             <a:avLst/>
           </a:prstGeom>
-          <a:solidFill>
-            <a:srgbClr val="F2F2F2"/>
-          </a:solidFill>
-          <a:ln w="9525">
-            <a:solidFill>
-              <a:srgbClr val="BFBFBF"/>
-            </a:solidFill>
-            <a:prstDash val="solid"/>
-          </a:ln>
-        </p:spPr>
-      </p:sp>
-      <p:sp>
-        <p:nvSpPr>
-          <p:cNvPr id="7" name="Text 5"/>
-          <p:cNvSpPr txBox="1"/>
-          <p:nvPr/>
-        </p:nvSpPr>
-        <p:spPr>
-          <a:xfrm>
-            <a:off x="548640" y="2331720"/>
-            <a:ext cx="4206240" cy="3154680"/>
-          </a:xfrm>
-          <a:prstGeom prst="rect">
-            <a:avLst/>
-          </a:prstGeom>
-          <a:noFill/>
-          <a:ln/>
-        </p:spPr>
-        <p:txBody>
-          <a:bodyPr wrap="square" lIns="635" tIns="635" rIns="635" bIns="635" rtlCol="0" anchor="ctr"/>
-          <a:lstStyle/>
-          <a:p>
-            <a:pPr algn="ctr" indent="0" marL="0">
-              <a:buNone/>
-            </a:pPr>
-            <a:r>
-              <a:rPr lang="en-US" sz="1200" dirty="0">
-                <a:solidFill>
-                  <a:srgbClr val="888888"/>
-                </a:solidFill>
-                <a:latin typeface="游ゴシック" pitchFamily="34" charset="0"/>
-                <a:ea typeface="游ゴシック" pitchFamily="34" charset="-122"/>
-                <a:cs typeface="游ゴシック" pitchFamily="34" charset="-120"/>
-              </a:rPr>
-              <a:t>写真</a:t>
-            </a:r>
-            <a:endParaRPr lang="en-US" sz="1200" dirty="0"/>
-          </a:p>
-          <a:p>
-            <a:pPr algn="ctr" indent="0" marL="0">
-              <a:buNone/>
-            </a:pPr>
-            <a:r>
-              <a:rPr lang="en-US" sz="1200" dirty="0">
-                <a:solidFill>
-                  <a:srgbClr val="888888"/>
-                </a:solidFill>
-                <a:latin typeface="游ゴシック" pitchFamily="34" charset="0"/>
-                <a:ea typeface="游ゴシック" pitchFamily="34" charset="-122"/>
-                <a:cs typeface="游ゴシック" pitchFamily="34" charset="-120"/>
-              </a:rPr>
-              <a:t>ai.jpg</a:t>
-            </a:r>
-            <a:endParaRPr lang="en-US" sz="1200" dirty="0"/>
-          </a:p>
-        </p:txBody>
-      </p:sp>
-      <p:sp>
-        <p:nvSpPr>
-          <p:cNvPr id="8" name="Text 6"/>
+        </p:spPr>
+      </p:pic>
+      <p:sp>
+        <p:nvSpPr>
+          <p:cNvPr id="7" name="Text 4"/>
           <p:cNvSpPr txBox="1"/>
           <p:nvPr/>
         </p:nvSpPr>

--- a/seminar/sekio-dx-2026-09/DXマーケティング後半編.pptx
+++ b/seminar/sekio-dx-2026-09/DXマーケティング後半編.pptx
@@ -2473,7 +2473,7 @@
           <a:p>
             <a:r>
               <a:rPr lang="en-US" dirty="0"/>
-              <a:t>自己紹介は1分。趣味・やってみたい事は本人記入（まだ空欄）。</a:t>
+              <a:t>自己紹介は1分。趣味とやってみたい事は、会場の空気をゆるめる用。深追いしない。</a:t>
             </a:r>
             <a:endParaRPr lang="en-US" dirty="0"/>
           </a:p>
@@ -13537,7 +13537,7 @@
                 <a:ea typeface="游ゴシック" pitchFamily="34" charset="-122"/>
                 <a:cs typeface="游ゴシック" pitchFamily="34" charset="-120"/>
               </a:rPr>
-              <a:t>（　　　　　　　　　　　　　　）</a:t>
+              <a:t>COTENラジオで歴史の勉強</a:t>
             </a:r>
             <a:endParaRPr lang="en-US" sz="1400" dirty="0"/>
           </a:p>
@@ -13618,7 +13618,7 @@
                 <a:ea typeface="游ゴシック" pitchFamily="34" charset="-122"/>
                 <a:cs typeface="游ゴシック" pitchFamily="34" charset="-120"/>
               </a:rPr>
-              <a:t>（　　　　　　　　　　　　　　）</a:t>
+              <a:t>ブータンへ旅行</a:t>
             </a:r>
             <a:endParaRPr lang="en-US" sz="1400" dirty="0"/>
           </a:p>
